--- a/docs/Lectures/Week05/Week05_GEOG2475_THR.pptx
+++ b/docs/Lectures/Week05/Week05_GEOG2475_THR.pptx
@@ -3037,7 +3037,7 @@
             <a:fld id="{66C520B4-85AA-9542-8CF7-3D2DDCE6041D}" type="datetimeFigureOut">
               <a:rPr lang="en-US" smtClean="0"/>
               <a:pPr/>
-              <a:t>9/17/2025</a:t>
+              <a:t>9/18/2025</a:t>
             </a:fld>
             <a:endParaRPr lang="en-US"/>
           </a:p>
@@ -4839,7 +4839,7 @@
           <a:p>
             <a:fld id="{7B6AF446-C7A3-4A2D-B01C-4080BC0DDC51}" type="datetime1">
               <a:rPr lang="en-US" smtClean="0"/>
-              <a:t>9/17/2025</a:t>
+              <a:t>9/18/2025</a:t>
             </a:fld>
             <a:endParaRPr lang="en-US"/>
           </a:p>
@@ -5043,7 +5043,7 @@
           <a:p>
             <a:fld id="{FED35F4A-7979-4619-A182-7748F9FBAA45}" type="datetime1">
               <a:rPr lang="en-US" smtClean="0"/>
-              <a:t>9/17/2025</a:t>
+              <a:t>9/18/2025</a:t>
             </a:fld>
             <a:endParaRPr lang="en-US"/>
           </a:p>
@@ -5406,7 +5406,7 @@
           <a:p>
             <a:fld id="{4E8A0E10-3CDB-43FE-B1B5-7D3654751138}" type="datetime1">
               <a:rPr lang="en-US" smtClean="0"/>
-              <a:t>9/17/2025</a:t>
+              <a:t>9/18/2025</a:t>
             </a:fld>
             <a:endParaRPr lang="en-US"/>
           </a:p>
@@ -5718,7 +5718,7 @@
           <a:p>
             <a:fld id="{C6B0FEA4-C6CA-4262-94C7-989766AA3A47}" type="datetime1">
               <a:rPr lang="en-US" smtClean="0"/>
-              <a:t>9/17/2025</a:t>
+              <a:t>9/18/2025</a:t>
             </a:fld>
             <a:endParaRPr lang="en-US"/>
           </a:p>
@@ -5917,7 +5917,7 @@
           <a:p>
             <a:fld id="{6F65A5F7-BE7B-4360-B821-FCDB8E9197AC}" type="datetime1">
               <a:rPr lang="en-US" smtClean="0"/>
-              <a:t>9/17/2025</a:t>
+              <a:t>9/18/2025</a:t>
             </a:fld>
             <a:endParaRPr lang="en-US"/>
           </a:p>
@@ -6230,7 +6230,7 @@
           <a:p>
             <a:fld id="{6145D492-0F60-495A-BAAC-3C877C1D64A2}" type="datetime1">
               <a:rPr lang="en-US" smtClean="0"/>
-              <a:t>9/17/2025</a:t>
+              <a:t>9/18/2025</a:t>
             </a:fld>
             <a:endParaRPr lang="en-US"/>
           </a:p>
@@ -6484,7 +6484,7 @@
           <a:p>
             <a:fld id="{4A322FED-C97B-4E3C-B05B-1278829CCA0F}" type="datetime1">
               <a:rPr lang="en-US" smtClean="0"/>
-              <a:t>9/17/2025</a:t>
+              <a:t>9/18/2025</a:t>
             </a:fld>
             <a:endParaRPr lang="en-US"/>
           </a:p>
@@ -6907,7 +6907,7 @@
           <a:p>
             <a:fld id="{1BBF91E7-DD27-45EE-9FAC-A58839C2E3FB}" type="datetime1">
               <a:rPr lang="en-US" smtClean="0"/>
-              <a:t>9/17/2025</a:t>
+              <a:t>9/18/2025</a:t>
             </a:fld>
             <a:endParaRPr lang="en-US"/>
           </a:p>
@@ -7031,7 +7031,7 @@
           <a:p>
             <a:fld id="{470DB943-D34E-498D-BB5B-1BC0D01A4C3C}" type="datetime1">
               <a:rPr lang="en-US" smtClean="0"/>
-              <a:t>9/17/2025</a:t>
+              <a:t>9/18/2025</a:t>
             </a:fld>
             <a:endParaRPr lang="en-US"/>
           </a:p>
@@ -7127,7 +7127,7 @@
           <a:p>
             <a:fld id="{0EF88AC7-A362-47DE-B037-3A7E785BA73D}" type="datetime1">
               <a:rPr lang="en-US" smtClean="0"/>
-              <a:t>9/17/2025</a:t>
+              <a:t>9/18/2025</a:t>
             </a:fld>
             <a:endParaRPr lang="en-US"/>
           </a:p>
@@ -7505,7 +7505,7 @@
           <a:p>
             <a:fld id="{1E09BAED-B7FC-4220-8037-60663F890984}" type="datetime1">
               <a:rPr lang="en-US" smtClean="0"/>
-              <a:t>9/17/2025</a:t>
+              <a:t>9/18/2025</a:t>
             </a:fld>
             <a:endParaRPr lang="en-US"/>
           </a:p>
@@ -7714,7 +7714,7 @@
           <a:p>
             <a:fld id="{E77A5B41-BFC4-4275-B283-99B49DA65AE7}" type="datetime1">
               <a:rPr lang="en-US" smtClean="0"/>
-              <a:t>9/17/2025</a:t>
+              <a:t>9/18/2025</a:t>
             </a:fld>
             <a:endParaRPr lang="en-US"/>
           </a:p>
@@ -7997,7 +7997,7 @@
           <a:p>
             <a:fld id="{BB3C0B96-D43B-410F-A514-3967CACDF6C4}" type="datetime1">
               <a:rPr lang="en-US" smtClean="0"/>
-              <a:t>9/17/2025</a:t>
+              <a:t>9/18/2025</a:t>
             </a:fld>
             <a:endParaRPr lang="en-US"/>
           </a:p>
@@ -8189,7 +8189,7 @@
           <a:p>
             <a:fld id="{C63DFB46-027F-4778-8182-714012A6E051}" type="datetime1">
               <a:rPr lang="en-US" smtClean="0"/>
-              <a:t>9/17/2025</a:t>
+              <a:t>9/18/2025</a:t>
             </a:fld>
             <a:endParaRPr lang="en-US"/>
           </a:p>
@@ -8552,7 +8552,7 @@
           <a:p>
             <a:fld id="{770FD05A-9631-4BEE-9AA4-5575ADA850E9}" type="datetime1">
               <a:rPr lang="en-US" smtClean="0"/>
-              <a:t>9/17/2025</a:t>
+              <a:t>9/18/2025</a:t>
             </a:fld>
             <a:endParaRPr lang="en-US"/>
           </a:p>
@@ -8864,7 +8864,7 @@
           <a:p>
             <a:fld id="{ED291B17-9318-49DB-B28B-6E5994AE9581}" type="datetime1">
               <a:rPr lang="en-US" smtClean="0"/>
-              <a:t>9/17/2025</a:t>
+              <a:t>9/18/2025</a:t>
             </a:fld>
             <a:endParaRPr lang="en-US" dirty="0"/>
           </a:p>
@@ -9062,7 +9062,7 @@
           <a:p>
             <a:fld id="{78DD82B9-B8EE-4375-B6FF-88FA6ABB15D9}" type="datetime1">
               <a:rPr lang="en-US" smtClean="0"/>
-              <a:t>9/17/2025</a:t>
+              <a:t>9/18/2025</a:t>
             </a:fld>
             <a:endParaRPr lang="en-US" dirty="0"/>
           </a:p>
@@ -9374,7 +9374,7 @@
           <a:p>
             <a:fld id="{B2497495-0637-405E-AE64-5CC7506D51F5}" type="datetime1">
               <a:rPr lang="en-US" smtClean="0"/>
-              <a:t>9/17/2025</a:t>
+              <a:t>9/18/2025</a:t>
             </a:fld>
             <a:endParaRPr lang="en-US" dirty="0"/>
           </a:p>
@@ -9627,7 +9627,7 @@
           <a:p>
             <a:fld id="{7BFFD690-9426-415D-8B65-26881E07B2D4}" type="datetime1">
               <a:rPr lang="en-US" smtClean="0"/>
-              <a:t>9/17/2025</a:t>
+              <a:t>9/18/2025</a:t>
             </a:fld>
             <a:endParaRPr lang="en-US" dirty="0"/>
           </a:p>
@@ -10049,7 +10049,7 @@
           <a:p>
             <a:fld id="{04C4989A-474C-40DE-95B9-011C28B71673}" type="datetime1">
               <a:rPr lang="en-US" smtClean="0"/>
-              <a:t>9/17/2025</a:t>
+              <a:t>9/18/2025</a:t>
             </a:fld>
             <a:endParaRPr lang="en-US" dirty="0"/>
           </a:p>
@@ -10172,7 +10172,7 @@
           <a:p>
             <a:fld id="{5DB4ED54-5B5E-4A04-93D3-5772E3CE3818}" type="datetime1">
               <a:rPr lang="en-US" smtClean="0"/>
-              <a:t>9/17/2025</a:t>
+              <a:t>9/18/2025</a:t>
             </a:fld>
             <a:endParaRPr lang="en-US" dirty="0"/>
           </a:p>
@@ -10267,7 +10267,7 @@
           <a:p>
             <a:fld id="{4EDE50D6-574B-40AF-946F-D52A04ADE379}" type="datetime1">
               <a:rPr lang="en-US" smtClean="0"/>
-              <a:t>9/17/2025</a:t>
+              <a:t>9/18/2025</a:t>
             </a:fld>
             <a:endParaRPr lang="en-US" dirty="0"/>
           </a:p>
@@ -10567,7 +10567,7 @@
           <a:p>
             <a:fld id="{FC9F5041-7C46-4557-A8EF-D9C07452E04F}" type="datetime1">
               <a:rPr lang="en-US" smtClean="0"/>
-              <a:t>9/17/2025</a:t>
+              <a:t>9/18/2025</a:t>
             </a:fld>
             <a:endParaRPr lang="en-US"/>
           </a:p>
@@ -10957,7 +10957,7 @@
           <a:p>
             <a:fld id="{D82884F1-FFEA-405F-9602-3DCA865EDA4E}" type="datetime1">
               <a:rPr lang="en-US" smtClean="0"/>
-              <a:t>9/17/2025</a:t>
+              <a:t>9/18/2025</a:t>
             </a:fld>
             <a:endParaRPr lang="en-US" dirty="0"/>
           </a:p>
@@ -11250,7 +11250,7 @@
           <a:p>
             <a:fld id="{7E18DB4A-8810-4A10-AD5C-D5E2C667F5B3}" type="datetime1">
               <a:rPr lang="en-US" smtClean="0"/>
-              <a:t>9/17/2025</a:t>
+              <a:t>9/18/2025</a:t>
             </a:fld>
             <a:endParaRPr lang="en-US" dirty="0"/>
           </a:p>
@@ -11442,7 +11442,7 @@
           <a:p>
             <a:fld id="{2CED4963-E985-44C4-B8C4-FDD613B7C2F8}" type="datetime1">
               <a:rPr lang="en-US" smtClean="0"/>
-              <a:t>9/17/2025</a:t>
+              <a:t>9/18/2025</a:t>
             </a:fld>
             <a:endParaRPr lang="en-US" dirty="0"/>
           </a:p>
@@ -11804,7 +11804,7 @@
           <a:p>
             <a:fld id="{ED291B17-9318-49DB-B28B-6E5994AE9581}" type="datetime1">
               <a:rPr lang="en-US" smtClean="0"/>
-              <a:t>9/17/2025</a:t>
+              <a:t>9/18/2025</a:t>
             </a:fld>
             <a:endParaRPr lang="en-US" dirty="0"/>
           </a:p>
@@ -12284,7 +12284,7 @@
           <a:p>
             <a:fld id="{ED291B17-9318-49DB-B28B-6E5994AE9581}" type="datetime1">
               <a:rPr lang="en-US" smtClean="0"/>
-              <a:t>9/17/2025</a:t>
+              <a:t>9/18/2025</a:t>
             </a:fld>
             <a:endParaRPr lang="en-US" dirty="0"/>
           </a:p>
@@ -12480,7 +12480,7 @@
           <a:p>
             <a:fld id="{78DD82B9-B8EE-4375-B6FF-88FA6ABB15D9}" type="datetime1">
               <a:rPr lang="en-US" smtClean="0"/>
-              <a:t>9/17/2025</a:t>
+              <a:t>9/18/2025</a:t>
             </a:fld>
             <a:endParaRPr lang="en-US" dirty="0"/>
           </a:p>
@@ -12791,7 +12791,7 @@
           <a:p>
             <a:fld id="{B2497495-0637-405E-AE64-5CC7506D51F5}" type="datetime1">
               <a:rPr lang="en-US" smtClean="0"/>
-              <a:t>9/17/2025</a:t>
+              <a:t>9/18/2025</a:t>
             </a:fld>
             <a:endParaRPr lang="en-US" dirty="0"/>
           </a:p>
@@ -13042,7 +13042,7 @@
           <a:p>
             <a:fld id="{7BFFD690-9426-415D-8B65-26881E07B2D4}" type="datetime1">
               <a:rPr lang="en-US" smtClean="0"/>
-              <a:t>9/17/2025</a:t>
+              <a:t>9/18/2025</a:t>
             </a:fld>
             <a:endParaRPr lang="en-US" dirty="0"/>
           </a:p>
@@ -13462,7 +13462,7 @@
           <a:p>
             <a:fld id="{04C4989A-474C-40DE-95B9-011C28B71673}" type="datetime1">
               <a:rPr lang="en-US" smtClean="0"/>
-              <a:t>9/17/2025</a:t>
+              <a:t>9/18/2025</a:t>
             </a:fld>
             <a:endParaRPr lang="en-US" dirty="0"/>
           </a:p>
@@ -13703,7 +13703,7 @@
           <a:p>
             <a:fld id="{9165F29B-8031-46B1-B8C6-0E15991220BD}" type="datetime1">
               <a:rPr lang="en-US" smtClean="0"/>
-              <a:t>9/17/2025</a:t>
+              <a:t>9/18/2025</a:t>
             </a:fld>
             <a:endParaRPr lang="en-US"/>
           </a:p>
@@ -13827,7 +13827,7 @@
           <a:p>
             <a:fld id="{5DB4ED54-5B5E-4A04-93D3-5772E3CE3818}" type="datetime1">
               <a:rPr lang="en-US" smtClean="0"/>
-              <a:t>9/17/2025</a:t>
+              <a:t>9/18/2025</a:t>
             </a:fld>
             <a:endParaRPr lang="en-US" dirty="0"/>
           </a:p>
@@ -13922,7 +13922,7 @@
           <a:p>
             <a:fld id="{4EDE50D6-574B-40AF-946F-D52A04ADE379}" type="datetime1">
               <a:rPr lang="en-US" smtClean="0"/>
-              <a:t>9/17/2025</a:t>
+              <a:t>9/18/2025</a:t>
             </a:fld>
             <a:endParaRPr lang="en-US" dirty="0"/>
           </a:p>
@@ -14298,7 +14298,7 @@
           <a:p>
             <a:fld id="{D82884F1-FFEA-405F-9602-3DCA865EDA4E}" type="datetime1">
               <a:rPr lang="en-US" smtClean="0"/>
-              <a:t>9/17/2025</a:t>
+              <a:t>9/18/2025</a:t>
             </a:fld>
             <a:endParaRPr lang="en-US" dirty="0"/>
           </a:p>
@@ -14591,7 +14591,7 @@
           <a:p>
             <a:fld id="{7E18DB4A-8810-4A10-AD5C-D5E2C667F5B3}" type="datetime1">
               <a:rPr lang="en-US" smtClean="0"/>
-              <a:t>9/17/2025</a:t>
+              <a:t>9/18/2025</a:t>
             </a:fld>
             <a:endParaRPr lang="en-US" dirty="0"/>
           </a:p>
@@ -14783,7 +14783,7 @@
           <a:p>
             <a:fld id="{2CED4963-E985-44C4-B8C4-FDD613B7C2F8}" type="datetime1">
               <a:rPr lang="en-US" smtClean="0"/>
-              <a:t>9/17/2025</a:t>
+              <a:t>9/18/2025</a:t>
             </a:fld>
             <a:endParaRPr lang="en-US" dirty="0"/>
           </a:p>
@@ -15145,7 +15145,7 @@
           <a:p>
             <a:fld id="{ED291B17-9318-49DB-B28B-6E5994AE9581}" type="datetime1">
               <a:rPr lang="en-US" smtClean="0"/>
-              <a:t>9/17/2025</a:t>
+              <a:t>9/18/2025</a:t>
             </a:fld>
             <a:endParaRPr lang="en-US" dirty="0"/>
           </a:p>
@@ -15456,7 +15456,7 @@
           <a:p>
             <a:fld id="{ED291B17-9318-49DB-B28B-6E5994AE9581}" type="datetime1">
               <a:rPr lang="en-US" smtClean="0"/>
-              <a:t>9/17/2025</a:t>
+              <a:t>9/18/2025</a:t>
             </a:fld>
             <a:endParaRPr lang="en-US" dirty="0"/>
           </a:p>
@@ -15654,7 +15654,7 @@
           <a:p>
             <a:fld id="{78DD82B9-B8EE-4375-B6FF-88FA6ABB15D9}" type="datetime1">
               <a:rPr lang="en-US" smtClean="0"/>
-              <a:t>9/17/2025</a:t>
+              <a:t>9/18/2025</a:t>
             </a:fld>
             <a:endParaRPr lang="en-US" dirty="0"/>
           </a:p>
@@ -15966,7 +15966,7 @@
           <a:p>
             <a:fld id="{B2497495-0637-405E-AE64-5CC7506D51F5}" type="datetime1">
               <a:rPr lang="en-US" smtClean="0"/>
-              <a:t>9/17/2025</a:t>
+              <a:t>9/18/2025</a:t>
             </a:fld>
             <a:endParaRPr lang="en-US" dirty="0"/>
           </a:p>
@@ -16219,7 +16219,7 @@
           <a:p>
             <a:fld id="{7BFFD690-9426-415D-8B65-26881E07B2D4}" type="datetime1">
               <a:rPr lang="en-US" smtClean="0"/>
-              <a:t>9/17/2025</a:t>
+              <a:t>9/18/2025</a:t>
             </a:fld>
             <a:endParaRPr lang="en-US" dirty="0"/>
           </a:p>
@@ -16641,7 +16641,7 @@
           <a:p>
             <a:fld id="{EA26BC96-89B3-4A8F-8C3A-8FECB7F0AF50}" type="datetime1">
               <a:rPr lang="en-US" smtClean="0"/>
-              <a:t>9/17/2025</a:t>
+              <a:t>9/18/2025</a:t>
             </a:fld>
             <a:endParaRPr lang="en-US"/>
           </a:p>
@@ -17064,7 +17064,7 @@
           <a:p>
             <a:fld id="{04C4989A-474C-40DE-95B9-011C28B71673}" type="datetime1">
               <a:rPr lang="en-US" smtClean="0"/>
-              <a:t>9/17/2025</a:t>
+              <a:t>9/18/2025</a:t>
             </a:fld>
             <a:endParaRPr lang="en-US" dirty="0"/>
           </a:p>
@@ -17187,7 +17187,7 @@
           <a:p>
             <a:fld id="{5DB4ED54-5B5E-4A04-93D3-5772E3CE3818}" type="datetime1">
               <a:rPr lang="en-US" smtClean="0"/>
-              <a:t>9/17/2025</a:t>
+              <a:t>9/18/2025</a:t>
             </a:fld>
             <a:endParaRPr lang="en-US" dirty="0"/>
           </a:p>
@@ -17282,7 +17282,7 @@
           <a:p>
             <a:fld id="{4EDE50D6-574B-40AF-946F-D52A04ADE379}" type="datetime1">
               <a:rPr lang="en-US" smtClean="0"/>
-              <a:t>9/17/2025</a:t>
+              <a:t>9/18/2025</a:t>
             </a:fld>
             <a:endParaRPr lang="en-US" dirty="0"/>
           </a:p>
@@ -17659,7 +17659,7 @@
           <a:p>
             <a:fld id="{D82884F1-FFEA-405F-9602-3DCA865EDA4E}" type="datetime1">
               <a:rPr lang="en-US" smtClean="0"/>
-              <a:t>9/17/2025</a:t>
+              <a:t>9/18/2025</a:t>
             </a:fld>
             <a:endParaRPr lang="en-US" dirty="0"/>
           </a:p>
@@ -17952,7 +17952,7 @@
           <a:p>
             <a:fld id="{7E18DB4A-8810-4A10-AD5C-D5E2C667F5B3}" type="datetime1">
               <a:rPr lang="en-US" smtClean="0"/>
-              <a:t>9/17/2025</a:t>
+              <a:t>9/18/2025</a:t>
             </a:fld>
             <a:endParaRPr lang="en-US" dirty="0"/>
           </a:p>
@@ -18144,7 +18144,7 @@
           <a:p>
             <a:fld id="{2CED4963-E985-44C4-B8C4-FDD613B7C2F8}" type="datetime1">
               <a:rPr lang="en-US" smtClean="0"/>
-              <a:t>9/17/2025</a:t>
+              <a:t>9/18/2025</a:t>
             </a:fld>
             <a:endParaRPr lang="en-US" dirty="0"/>
           </a:p>
@@ -18506,7 +18506,7 @@
           <a:p>
             <a:fld id="{ED291B17-9318-49DB-B28B-6E5994AE9581}" type="datetime1">
               <a:rPr lang="en-US" smtClean="0"/>
-              <a:t>9/17/2025</a:t>
+              <a:t>9/18/2025</a:t>
             </a:fld>
             <a:endParaRPr lang="en-US" dirty="0"/>
           </a:p>
@@ -18810,7 +18810,7 @@
           <a:p>
             <a:fld id="{979F6BEE-F3E4-4F76-B56D-1C48BBD7AEA9}" type="datetime1">
               <a:rPr lang="en-US" smtClean="0"/>
-              <a:t>9/17/2025</a:t>
+              <a:t>9/18/2025</a:t>
             </a:fld>
             <a:endParaRPr lang="en-US"/>
           </a:p>
@@ -18906,7 +18906,7 @@
           <a:p>
             <a:fld id="{5EBF79E3-AE5C-4717-978E-15FC3620ACEF}" type="datetime1">
               <a:rPr lang="en-US" smtClean="0"/>
-              <a:t>9/17/2025</a:t>
+              <a:t>9/18/2025</a:t>
             </a:fld>
             <a:endParaRPr lang="en-US"/>
           </a:p>
@@ -19284,7 +19284,7 @@
           <a:p>
             <a:fld id="{07B82B69-02FF-4A00-BF94-063310C8EF70}" type="datetime1">
               <a:rPr lang="en-US" smtClean="0"/>
-              <a:t>9/17/2025</a:t>
+              <a:t>9/18/2025</a:t>
             </a:fld>
             <a:endParaRPr lang="en-US"/>
           </a:p>
@@ -19577,7 +19577,7 @@
           <a:p>
             <a:fld id="{8C7A3C19-50BF-43F6-AD63-C05469BE5035}" type="datetime1">
               <a:rPr lang="en-US" smtClean="0"/>
-              <a:t>9/17/2025</a:t>
+              <a:t>9/18/2025</a:t>
             </a:fld>
             <a:endParaRPr lang="en-US"/>
           </a:p>
@@ -19792,7 +19792,7 @@
           <a:p>
             <a:fld id="{61ED8BDC-014F-440E-B651-A3D5A758B980}" type="datetime1">
               <a:rPr lang="en-US" smtClean="0"/>
-              <a:t>9/17/2025</a:t>
+              <a:t>9/18/2025</a:t>
             </a:fld>
             <a:endParaRPr lang="en-US"/>
           </a:p>
@@ -20573,7 +20573,7 @@
           <a:p>
             <a:fld id="{8234BEC2-5A9D-42E1-9C16-1E9F257755B7}" type="datetime1">
               <a:rPr lang="en-US" smtClean="0"/>
-              <a:t>9/17/2025</a:t>
+              <a:t>9/18/2025</a:t>
             </a:fld>
             <a:endParaRPr lang="en-US"/>
           </a:p>
@@ -21354,7 +21354,7 @@
           <a:p>
             <a:fld id="{ED291B17-9318-49DB-B28B-6E5994AE9581}" type="datetime1">
               <a:rPr lang="en-US" smtClean="0"/>
-              <a:t>9/17/2025</a:t>
+              <a:t>9/18/2025</a:t>
             </a:fld>
             <a:endParaRPr lang="en-US" dirty="0"/>
           </a:p>
@@ -22135,7 +22135,7 @@
           <a:p>
             <a:fld id="{ED291B17-9318-49DB-B28B-6E5994AE9581}" type="datetime1">
               <a:rPr lang="en-US" smtClean="0"/>
-              <a:t>9/17/2025</a:t>
+              <a:t>9/18/2025</a:t>
             </a:fld>
             <a:endParaRPr lang="en-US" dirty="0"/>
           </a:p>
@@ -22915,7 +22915,7 @@
           <a:p>
             <a:fld id="{ED291B17-9318-49DB-B28B-6E5994AE9581}" type="datetime1">
               <a:rPr lang="en-US" smtClean="0"/>
-              <a:t>9/17/2025</a:t>
+              <a:t>9/18/2025</a:t>
             </a:fld>
             <a:endParaRPr lang="en-US" dirty="0"/>
           </a:p>
@@ -29464,8 +29464,8 @@
         </p:nvGrpSpPr>
         <p:grpSpPr>
           <a:xfrm>
-            <a:off x="4989422" y="1411424"/>
-            <a:ext cx="3035479" cy="3115365"/>
+            <a:off x="6108270" y="436140"/>
+            <a:ext cx="2019308" cy="2145437"/>
             <a:chOff x="7389810" y="1710446"/>
             <a:chExt cx="4495835" cy="4614154"/>
           </a:xfrm>
@@ -30022,6 +30022,36 @@
           </a:fontRef>
         </p:style>
       </p:cxnSp>
+      <p:pic>
+        <p:nvPicPr>
+          <p:cNvPr id="18" name="Picture 17">
+            <a:extLst>
+              <a:ext uri="{FF2B5EF4-FFF2-40B4-BE49-F238E27FC236}">
+                <a16:creationId xmlns:a16="http://schemas.microsoft.com/office/drawing/2014/main" id="{0F9EE1DB-4A28-B5B1-6368-ECED8A5DE383}"/>
+              </a:ext>
+            </a:extLst>
+          </p:cNvPr>
+          <p:cNvPicPr>
+            <a:picLocks noChangeAspect="1"/>
+          </p:cNvPicPr>
+          <p:nvPr/>
+        </p:nvPicPr>
+        <p:blipFill>
+          <a:blip r:embed="rId3"/>
+          <a:stretch>
+            <a:fillRect/>
+          </a:stretch>
+        </p:blipFill>
+        <p:spPr>
+          <a:xfrm>
+            <a:off x="3095065" y="2595527"/>
+            <a:ext cx="3013205" cy="2222409"/>
+          </a:xfrm>
+          <a:prstGeom prst="rect">
+            <a:avLst/>
+          </a:prstGeom>
+        </p:spPr>
+      </p:pic>
     </p:spTree>
     <p:extLst>
       <p:ext uri="{BB962C8B-B14F-4D97-AF65-F5344CB8AC3E}">
@@ -30584,6 +30614,42 @@
           </a:prstGeom>
         </p:spPr>
       </p:pic>
+      <p:sp>
+        <p:nvSpPr>
+          <p:cNvPr id="4" name="TextBox 3">
+            <a:extLst>
+              <a:ext uri="{FF2B5EF4-FFF2-40B4-BE49-F238E27FC236}">
+                <a16:creationId xmlns:a16="http://schemas.microsoft.com/office/drawing/2014/main" id="{6BC60706-CC7C-3BD4-C1F5-450C1711ACD5}"/>
+              </a:ext>
+            </a:extLst>
+          </p:cNvPr>
+          <p:cNvSpPr txBox="1"/>
+          <p:nvPr/>
+        </p:nvSpPr>
+        <p:spPr>
+          <a:xfrm>
+            <a:off x="0" y="4830870"/>
+            <a:ext cx="4633993" cy="276999"/>
+          </a:xfrm>
+          <a:prstGeom prst="rect">
+            <a:avLst/>
+          </a:prstGeom>
+          <a:noFill/>
+        </p:spPr>
+        <p:txBody>
+          <a:bodyPr wrap="square" rtlCol="0">
+            <a:spAutoFit/>
+          </a:bodyPr>
+          <a:lstStyle/>
+          <a:p>
+            <a:r>
+              <a:rPr lang="en-US" altLang="zh-CN" sz="1200" dirty="0"/>
+              <a:t>Source: https://www.e-education.psu.edu/spatialdb/node/2023</a:t>
+            </a:r>
+            <a:endParaRPr lang="zh-CN" altLang="en-US" sz="1200" dirty="0"/>
+          </a:p>
+        </p:txBody>
+      </p:sp>
     </p:spTree>
     <p:extLst>
       <p:ext uri="{BB962C8B-B14F-4D97-AF65-F5344CB8AC3E}">
